--- a/assets/images/Experitments_Procedures_Psychophysics_StimulusPresentation.pptx
+++ b/assets/images/Experitments_Procedures_Psychophysics_StimulusPresentation.pptx
@@ -402,7 +402,7 @@
           <a:p>
             <a:fld id="{43466010-90F5-41E6-AAE8-7E580DBF8C7C}" type="datetimeFigureOut">
               <a:rPr lang="en-DK" smtClean="0"/>
-              <a:t>27/04/2026</a:t>
+              <a:t>28/04/2026</a:t>
             </a:fld>
             <a:endParaRPr lang="en-DK"/>
           </a:p>
@@ -889,7 +889,7 @@
           <a:p>
             <a:fld id="{F1465E3F-0B9F-47C9-9E08-5C827E095B3E}" type="datetimeFigureOut">
               <a:rPr lang="en-DK" smtClean="0"/>
-              <a:t>27/04/2026</a:t>
+              <a:t>28/04/2026</a:t>
             </a:fld>
             <a:endParaRPr lang="en-DK"/>
           </a:p>
@@ -1059,7 +1059,7 @@
           <a:p>
             <a:fld id="{F1465E3F-0B9F-47C9-9E08-5C827E095B3E}" type="datetimeFigureOut">
               <a:rPr lang="en-DK" smtClean="0"/>
-              <a:t>27/04/2026</a:t>
+              <a:t>28/04/2026</a:t>
             </a:fld>
             <a:endParaRPr lang="en-DK"/>
           </a:p>
@@ -1239,7 +1239,7 @@
           <a:p>
             <a:fld id="{F1465E3F-0B9F-47C9-9E08-5C827E095B3E}" type="datetimeFigureOut">
               <a:rPr lang="en-DK" smtClean="0"/>
-              <a:t>27/04/2026</a:t>
+              <a:t>28/04/2026</a:t>
             </a:fld>
             <a:endParaRPr lang="en-DK"/>
           </a:p>
@@ -1409,7 +1409,7 @@
           <a:p>
             <a:fld id="{F1465E3F-0B9F-47C9-9E08-5C827E095B3E}" type="datetimeFigureOut">
               <a:rPr lang="en-DK" smtClean="0"/>
-              <a:t>27/04/2026</a:t>
+              <a:t>28/04/2026</a:t>
             </a:fld>
             <a:endParaRPr lang="en-DK"/>
           </a:p>
@@ -1655,7 +1655,7 @@
           <a:p>
             <a:fld id="{F1465E3F-0B9F-47C9-9E08-5C827E095B3E}" type="datetimeFigureOut">
               <a:rPr lang="en-DK" smtClean="0"/>
-              <a:t>27/04/2026</a:t>
+              <a:t>28/04/2026</a:t>
             </a:fld>
             <a:endParaRPr lang="en-DK"/>
           </a:p>
@@ -1887,7 +1887,7 @@
           <a:p>
             <a:fld id="{F1465E3F-0B9F-47C9-9E08-5C827E095B3E}" type="datetimeFigureOut">
               <a:rPr lang="en-DK" smtClean="0"/>
-              <a:t>27/04/2026</a:t>
+              <a:t>28/04/2026</a:t>
             </a:fld>
             <a:endParaRPr lang="en-DK"/>
           </a:p>
@@ -2254,7 +2254,7 @@
           <a:p>
             <a:fld id="{F1465E3F-0B9F-47C9-9E08-5C827E095B3E}" type="datetimeFigureOut">
               <a:rPr lang="en-DK" smtClean="0"/>
-              <a:t>27/04/2026</a:t>
+              <a:t>28/04/2026</a:t>
             </a:fld>
             <a:endParaRPr lang="en-DK"/>
           </a:p>
@@ -2372,7 +2372,7 @@
           <a:p>
             <a:fld id="{F1465E3F-0B9F-47C9-9E08-5C827E095B3E}" type="datetimeFigureOut">
               <a:rPr lang="en-DK" smtClean="0"/>
-              <a:t>27/04/2026</a:t>
+              <a:t>28/04/2026</a:t>
             </a:fld>
             <a:endParaRPr lang="en-DK"/>
           </a:p>
@@ -2467,7 +2467,7 @@
           <a:p>
             <a:fld id="{F1465E3F-0B9F-47C9-9E08-5C827E095B3E}" type="datetimeFigureOut">
               <a:rPr lang="en-DK" smtClean="0"/>
-              <a:t>27/04/2026</a:t>
+              <a:t>28/04/2026</a:t>
             </a:fld>
             <a:endParaRPr lang="en-DK"/>
           </a:p>
@@ -2744,7 +2744,7 @@
           <a:p>
             <a:fld id="{F1465E3F-0B9F-47C9-9E08-5C827E095B3E}" type="datetimeFigureOut">
               <a:rPr lang="en-DK" smtClean="0"/>
-              <a:t>27/04/2026</a:t>
+              <a:t>28/04/2026</a:t>
             </a:fld>
             <a:endParaRPr lang="en-DK"/>
           </a:p>
@@ -3001,7 +3001,7 @@
           <a:p>
             <a:fld id="{F1465E3F-0B9F-47C9-9E08-5C827E095B3E}" type="datetimeFigureOut">
               <a:rPr lang="en-DK" smtClean="0"/>
-              <a:t>27/04/2026</a:t>
+              <a:t>28/04/2026</a:t>
             </a:fld>
             <a:endParaRPr lang="en-DK"/>
           </a:p>
@@ -3214,7 +3214,7 @@
           <a:p>
             <a:fld id="{F1465E3F-0B9F-47C9-9E08-5C827E095B3E}" type="datetimeFigureOut">
               <a:rPr lang="en-DK" smtClean="0"/>
-              <a:t>27/04/2026</a:t>
+              <a:t>28/04/2026</a:t>
             </a:fld>
             <a:endParaRPr lang="en-DK"/>
           </a:p>
@@ -3621,10 +3621,10 @@
       </p:grpSpPr>
       <p:pic>
         <p:nvPicPr>
-          <p:cNvPr id="8" name="Picture 7" descr="PTT Label (38,0s),&#10;&#10;AI-generated content may be incorrect.">
+          <p:cNvPr id="7" name="Picture 6" descr="The image displays a graph with two lines: one showing the responses (Yes/No) and another depicting current (mA) over time (ms), with a stimulus value of 4321012.&#10;&#10;AI-generated content may be incorrect.">
             <a:extLst>
               <a:ext uri="{FF2B5EF4-FFF2-40B4-BE49-F238E27FC236}">
-                <a16:creationId xmlns:a16="http://schemas.microsoft.com/office/drawing/2014/main" id="{67110660-29DA-5653-A378-AED011B6B7B1}"/>
+                <a16:creationId xmlns:a16="http://schemas.microsoft.com/office/drawing/2014/main" id="{A945BFF5-7599-794E-C780-13AC9984667A}"/>
               </a:ext>
             </a:extLst>
           </p:cNvPr>
@@ -3641,8 +3641,8 @@
         </p:blipFill>
         <p:spPr>
           <a:xfrm>
-            <a:off x="7547315" y="4704208"/>
-            <a:ext cx="6506483" cy="4991797"/>
+            <a:off x="5121510" y="4209783"/>
+            <a:ext cx="5353797" cy="4858428"/>
           </a:xfrm>
           <a:prstGeom prst="rect">
             <a:avLst/>
@@ -3663,8 +3663,8 @@
         </p:nvSpPr>
         <p:spPr>
           <a:xfrm>
-            <a:off x="7547315" y="5216235"/>
-            <a:ext cx="6506483" cy="4570475"/>
+            <a:off x="5121509" y="6359238"/>
+            <a:ext cx="5353797" cy="2165466"/>
           </a:xfrm>
           <a:prstGeom prst="rect">
             <a:avLst/>
@@ -3715,8 +3715,8 @@
         </p:nvSpPr>
         <p:spPr>
           <a:xfrm flipV="1">
-            <a:off x="7547315" y="4704209"/>
-            <a:ext cx="6506483" cy="512026"/>
+            <a:off x="5121509" y="4010890"/>
+            <a:ext cx="5353797" cy="2348343"/>
           </a:xfrm>
           <a:prstGeom prst="rect">
             <a:avLst/>
@@ -3767,8 +3767,8 @@
         </p:nvSpPr>
         <p:spPr>
           <a:xfrm>
-            <a:off x="14686601" y="7209198"/>
-            <a:ext cx="2704202" cy="584775"/>
+            <a:off x="11299164" y="7149583"/>
+            <a:ext cx="3114571" cy="584775"/>
           </a:xfrm>
           <a:prstGeom prst="rect">
             <a:avLst/>
@@ -3783,7 +3783,7 @@
           <a:p>
             <a:r>
               <a:rPr lang="en-US" sz="3200" dirty="0"/>
-              <a:t>Timing display</a:t>
+              <a:t>Stimulus display</a:t>
             </a:r>
             <a:endParaRPr lang="en-DK" sz="3200" dirty="0"/>
           </a:p>
@@ -3806,9 +3806,9 @@
           <p:nvPr/>
         </p:nvCxnSpPr>
         <p:spPr>
-          <a:xfrm flipH="1" flipV="1">
-            <a:off x="14053798" y="7501473"/>
-            <a:ext cx="632803" cy="113"/>
+          <a:xfrm flipH="1">
+            <a:off x="10475306" y="7441971"/>
+            <a:ext cx="823858" cy="0"/>
           </a:xfrm>
           <a:prstGeom prst="straightConnector1">
             <a:avLst/>
@@ -3849,8 +3849,8 @@
         </p:nvSpPr>
         <p:spPr>
           <a:xfrm>
-            <a:off x="14686601" y="4667834"/>
-            <a:ext cx="3769558" cy="584775"/>
+            <a:off x="11299164" y="4892673"/>
+            <a:ext cx="2145139" cy="584775"/>
           </a:xfrm>
           <a:prstGeom prst="rect">
             <a:avLst/>
@@ -3865,7 +3865,7 @@
           <a:p>
             <a:r>
               <a:rPr lang="en-US" sz="3200" dirty="0"/>
-              <a:t>Operator instruction</a:t>
+              <a:t>Responses</a:t>
             </a:r>
             <a:endParaRPr lang="en-DK" sz="3200" dirty="0"/>
           </a:p>
@@ -3889,8 +3889,8 @@
         </p:nvCxnSpPr>
         <p:spPr>
           <a:xfrm flipH="1">
-            <a:off x="14053798" y="4960222"/>
-            <a:ext cx="632803" cy="0"/>
+            <a:off x="10475306" y="5185061"/>
+            <a:ext cx="823858" cy="0"/>
           </a:xfrm>
           <a:prstGeom prst="straightConnector1">
             <a:avLst/>
@@ -3931,8 +3931,8 @@
         </p:nvSpPr>
         <p:spPr>
           <a:xfrm flipV="1">
-            <a:off x="12302836" y="9183977"/>
-            <a:ext cx="1750962" cy="548401"/>
+            <a:off x="5121509" y="8524702"/>
+            <a:ext cx="5353797" cy="543507"/>
           </a:xfrm>
           <a:prstGeom prst="rect">
             <a:avLst/>
@@ -3983,8 +3983,8 @@
         </p:nvSpPr>
         <p:spPr>
           <a:xfrm>
-            <a:off x="14686601" y="9165789"/>
-            <a:ext cx="5131837" cy="584775"/>
+            <a:off x="11299164" y="8255400"/>
+            <a:ext cx="5353797" cy="1077218"/>
           </a:xfrm>
           <a:prstGeom prst="rect">
             <a:avLst/>
@@ -3999,7 +3999,7 @@
           <a:p>
             <a:r>
               <a:rPr lang="en-US" sz="3200" dirty="0"/>
-              <a:t>Timing information</a:t>
+              <a:t>Stimulation and intensity control</a:t>
             </a:r>
             <a:endParaRPr lang="en-DK" sz="3200" dirty="0"/>
           </a:p>
@@ -4023,10 +4023,546 @@
         </p:nvCxnSpPr>
         <p:spPr>
           <a:xfrm flipH="1">
-            <a:off x="14053798" y="9458177"/>
-            <a:ext cx="632803" cy="0"/>
+            <a:off x="10475306" y="8794009"/>
+            <a:ext cx="823858" cy="2446"/>
           </a:xfrm>
           <a:prstGeom prst="straightConnector1">
+            <a:avLst/>
+          </a:prstGeom>
+          <a:ln w="38100">
+            <a:solidFill>
+              <a:srgbClr val="FF0000"/>
+            </a:solidFill>
+            <a:tailEnd type="triangle"/>
+          </a:ln>
+        </p:spPr>
+        <p:style>
+          <a:lnRef idx="2">
+            <a:schemeClr val="accent1"/>
+          </a:lnRef>
+          <a:fillRef idx="0">
+            <a:schemeClr val="accent1"/>
+          </a:fillRef>
+          <a:effectRef idx="1">
+            <a:schemeClr val="accent1"/>
+          </a:effectRef>
+          <a:fontRef idx="minor">
+            <a:schemeClr val="tx1"/>
+          </a:fontRef>
+        </p:style>
+      </p:cxnSp>
+      <p:sp>
+        <p:nvSpPr>
+          <p:cNvPr id="30" name="Rectangle 29">
+            <a:extLst>
+              <a:ext uri="{FF2B5EF4-FFF2-40B4-BE49-F238E27FC236}">
+                <a16:creationId xmlns:a16="http://schemas.microsoft.com/office/drawing/2014/main" id="{45F9C200-9230-5DE3-0F98-3D1036C876F2}"/>
+              </a:ext>
+            </a:extLst>
+          </p:cNvPr>
+          <p:cNvSpPr/>
+          <p:nvPr/>
+        </p:nvSpPr>
+        <p:spPr>
+          <a:xfrm flipV="1">
+            <a:off x="5269706" y="8636792"/>
+            <a:ext cx="546894" cy="347661"/>
+          </a:xfrm>
+          <a:prstGeom prst="rect">
+            <a:avLst/>
+          </a:prstGeom>
+          <a:noFill/>
+          <a:ln>
+            <a:solidFill>
+              <a:srgbClr val="FF0000"/>
+            </a:solidFill>
+          </a:ln>
+        </p:spPr>
+        <p:style>
+          <a:lnRef idx="2">
+            <a:schemeClr val="accent1">
+              <a:shade val="15000"/>
+            </a:schemeClr>
+          </a:lnRef>
+          <a:fillRef idx="1">
+            <a:schemeClr val="accent1"/>
+          </a:fillRef>
+          <a:effectRef idx="0">
+            <a:schemeClr val="accent1"/>
+          </a:effectRef>
+          <a:fontRef idx="minor">
+            <a:schemeClr val="lt1"/>
+          </a:fontRef>
+        </p:style>
+        <p:txBody>
+          <a:bodyPr rtlCol="0" anchor="ctr"/>
+          <a:lstStyle/>
+          <a:p>
+            <a:pPr algn="ctr"/>
+            <a:endParaRPr lang="en-DK"/>
+          </a:p>
+        </p:txBody>
+      </p:sp>
+      <p:sp>
+        <p:nvSpPr>
+          <p:cNvPr id="31" name="Rectangle 30">
+            <a:extLst>
+              <a:ext uri="{FF2B5EF4-FFF2-40B4-BE49-F238E27FC236}">
+                <a16:creationId xmlns:a16="http://schemas.microsoft.com/office/drawing/2014/main" id="{2A117ACD-3C13-8A0D-2DBE-CB1FD65A84F5}"/>
+              </a:ext>
+            </a:extLst>
+          </p:cNvPr>
+          <p:cNvSpPr/>
+          <p:nvPr/>
+        </p:nvSpPr>
+        <p:spPr>
+          <a:xfrm flipV="1">
+            <a:off x="6176962" y="8636791"/>
+            <a:ext cx="566738" cy="347661"/>
+          </a:xfrm>
+          <a:prstGeom prst="rect">
+            <a:avLst/>
+          </a:prstGeom>
+          <a:noFill/>
+          <a:ln>
+            <a:solidFill>
+              <a:srgbClr val="FF0000"/>
+            </a:solidFill>
+          </a:ln>
+        </p:spPr>
+        <p:style>
+          <a:lnRef idx="2">
+            <a:schemeClr val="accent1">
+              <a:shade val="15000"/>
+            </a:schemeClr>
+          </a:lnRef>
+          <a:fillRef idx="1">
+            <a:schemeClr val="accent1"/>
+          </a:fillRef>
+          <a:effectRef idx="0">
+            <a:schemeClr val="accent1"/>
+          </a:effectRef>
+          <a:fontRef idx="minor">
+            <a:schemeClr val="lt1"/>
+          </a:fontRef>
+        </p:style>
+        <p:txBody>
+          <a:bodyPr rtlCol="0" anchor="ctr"/>
+          <a:lstStyle/>
+          <a:p>
+            <a:pPr algn="ctr"/>
+            <a:endParaRPr lang="en-DK"/>
+          </a:p>
+        </p:txBody>
+      </p:sp>
+      <p:sp>
+        <p:nvSpPr>
+          <p:cNvPr id="32" name="Rectangle 31">
+            <a:extLst>
+              <a:ext uri="{FF2B5EF4-FFF2-40B4-BE49-F238E27FC236}">
+                <a16:creationId xmlns:a16="http://schemas.microsoft.com/office/drawing/2014/main" id="{2308BF6D-2D9D-DA96-AC0C-68BFB8E584BB}"/>
+              </a:ext>
+            </a:extLst>
+          </p:cNvPr>
+          <p:cNvSpPr/>
+          <p:nvPr/>
+        </p:nvSpPr>
+        <p:spPr>
+          <a:xfrm flipV="1">
+            <a:off x="7436643" y="8636790"/>
+            <a:ext cx="566738" cy="347661"/>
+          </a:xfrm>
+          <a:prstGeom prst="rect">
+            <a:avLst/>
+          </a:prstGeom>
+          <a:noFill/>
+          <a:ln>
+            <a:solidFill>
+              <a:srgbClr val="FF0000"/>
+            </a:solidFill>
+          </a:ln>
+        </p:spPr>
+        <p:style>
+          <a:lnRef idx="2">
+            <a:schemeClr val="accent1">
+              <a:shade val="15000"/>
+            </a:schemeClr>
+          </a:lnRef>
+          <a:fillRef idx="1">
+            <a:schemeClr val="accent1"/>
+          </a:fillRef>
+          <a:effectRef idx="0">
+            <a:schemeClr val="accent1"/>
+          </a:effectRef>
+          <a:fontRef idx="minor">
+            <a:schemeClr val="lt1"/>
+          </a:fontRef>
+        </p:style>
+        <p:txBody>
+          <a:bodyPr rtlCol="0" anchor="ctr"/>
+          <a:lstStyle/>
+          <a:p>
+            <a:pPr algn="ctr"/>
+            <a:endParaRPr lang="en-DK"/>
+          </a:p>
+        </p:txBody>
+      </p:sp>
+      <p:sp>
+        <p:nvSpPr>
+          <p:cNvPr id="34" name="Rectangle 33">
+            <a:extLst>
+              <a:ext uri="{FF2B5EF4-FFF2-40B4-BE49-F238E27FC236}">
+                <a16:creationId xmlns:a16="http://schemas.microsoft.com/office/drawing/2014/main" id="{E570EB4E-2ED5-8C41-E372-13033A426509}"/>
+              </a:ext>
+            </a:extLst>
+          </p:cNvPr>
+          <p:cNvSpPr/>
+          <p:nvPr/>
+        </p:nvSpPr>
+        <p:spPr>
+          <a:xfrm flipV="1">
+            <a:off x="9805380" y="8628976"/>
+            <a:ext cx="566738" cy="347661"/>
+          </a:xfrm>
+          <a:prstGeom prst="rect">
+            <a:avLst/>
+          </a:prstGeom>
+          <a:noFill/>
+          <a:ln>
+            <a:solidFill>
+              <a:srgbClr val="FF0000"/>
+            </a:solidFill>
+          </a:ln>
+        </p:spPr>
+        <p:style>
+          <a:lnRef idx="2">
+            <a:schemeClr val="accent1">
+              <a:shade val="15000"/>
+            </a:schemeClr>
+          </a:lnRef>
+          <a:fillRef idx="1">
+            <a:schemeClr val="accent1"/>
+          </a:fillRef>
+          <a:effectRef idx="0">
+            <a:schemeClr val="accent1"/>
+          </a:effectRef>
+          <a:fontRef idx="minor">
+            <a:schemeClr val="lt1"/>
+          </a:fontRef>
+        </p:style>
+        <p:txBody>
+          <a:bodyPr rtlCol="0" anchor="ctr"/>
+          <a:lstStyle/>
+          <a:p>
+            <a:pPr algn="ctr"/>
+            <a:endParaRPr lang="en-DK"/>
+          </a:p>
+        </p:txBody>
+      </p:sp>
+      <p:cxnSp>
+        <p:nvCxnSpPr>
+          <p:cNvPr id="36" name="Connector: Elbow 35">
+            <a:extLst>
+              <a:ext uri="{FF2B5EF4-FFF2-40B4-BE49-F238E27FC236}">
+                <a16:creationId xmlns:a16="http://schemas.microsoft.com/office/drawing/2014/main" id="{E46F1F4E-DCA7-63E6-7EE2-2C9D7E6123E6}"/>
+              </a:ext>
+            </a:extLst>
+          </p:cNvPr>
+          <p:cNvCxnSpPr>
+            <a:cxnSpLocks/>
+            <a:stCxn id="38" idx="1"/>
+            <a:endCxn id="34" idx="0"/>
+          </p:cNvCxnSpPr>
+          <p:nvPr/>
+        </p:nvCxnSpPr>
+        <p:spPr>
+          <a:xfrm rot="10800000">
+            <a:off x="10088750" y="8976638"/>
+            <a:ext cx="519511" cy="648369"/>
+          </a:xfrm>
+          <a:prstGeom prst="bentConnector2">
+            <a:avLst/>
+          </a:prstGeom>
+          <a:ln w="38100">
+            <a:solidFill>
+              <a:srgbClr val="FF0000"/>
+            </a:solidFill>
+            <a:tailEnd type="triangle"/>
+          </a:ln>
+        </p:spPr>
+        <p:style>
+          <a:lnRef idx="2">
+            <a:schemeClr val="accent1"/>
+          </a:lnRef>
+          <a:fillRef idx="0">
+            <a:schemeClr val="accent1"/>
+          </a:fillRef>
+          <a:effectRef idx="1">
+            <a:schemeClr val="accent1"/>
+          </a:effectRef>
+          <a:fontRef idx="minor">
+            <a:schemeClr val="tx1"/>
+          </a:fontRef>
+        </p:style>
+      </p:cxnSp>
+      <p:sp>
+        <p:nvSpPr>
+          <p:cNvPr id="38" name="TextBox 37">
+            <a:extLst>
+              <a:ext uri="{FF2B5EF4-FFF2-40B4-BE49-F238E27FC236}">
+                <a16:creationId xmlns:a16="http://schemas.microsoft.com/office/drawing/2014/main" id="{ACF9A6E3-23E0-FE77-03E6-384A888C1164}"/>
+              </a:ext>
+            </a:extLst>
+          </p:cNvPr>
+          <p:cNvSpPr txBox="1"/>
+          <p:nvPr/>
+        </p:nvSpPr>
+        <p:spPr>
+          <a:xfrm>
+            <a:off x="10608260" y="9332618"/>
+            <a:ext cx="3195875" cy="584775"/>
+          </a:xfrm>
+          <a:prstGeom prst="rect">
+            <a:avLst/>
+          </a:prstGeom>
+          <a:noFill/>
+        </p:spPr>
+        <p:txBody>
+          <a:bodyPr wrap="none" rtlCol="0">
+            <a:spAutoFit/>
+          </a:bodyPr>
+          <a:lstStyle/>
+          <a:p>
+            <a:r>
+              <a:rPr lang="en-US" sz="3200" dirty="0"/>
+              <a:t>Accept the result</a:t>
+            </a:r>
+            <a:endParaRPr lang="en-DK" sz="3200" dirty="0"/>
+          </a:p>
+        </p:txBody>
+      </p:sp>
+      <p:sp>
+        <p:nvSpPr>
+          <p:cNvPr id="39" name="TextBox 38">
+            <a:extLst>
+              <a:ext uri="{FF2B5EF4-FFF2-40B4-BE49-F238E27FC236}">
+                <a16:creationId xmlns:a16="http://schemas.microsoft.com/office/drawing/2014/main" id="{4B989D3F-F838-51FB-3A72-2771F1EE4786}"/>
+              </a:ext>
+            </a:extLst>
+          </p:cNvPr>
+          <p:cNvSpPr txBox="1"/>
+          <p:nvPr/>
+        </p:nvSpPr>
+        <p:spPr>
+          <a:xfrm>
+            <a:off x="10608260" y="9884985"/>
+            <a:ext cx="3310906" cy="584775"/>
+          </a:xfrm>
+          <a:prstGeom prst="rect">
+            <a:avLst/>
+          </a:prstGeom>
+          <a:noFill/>
+        </p:spPr>
+        <p:txBody>
+          <a:bodyPr wrap="none" rtlCol="0">
+            <a:spAutoFit/>
+          </a:bodyPr>
+          <a:lstStyle/>
+          <a:p>
+            <a:r>
+              <a:rPr lang="en-US" sz="3200" dirty="0"/>
+              <a:t>Increase intensity</a:t>
+            </a:r>
+            <a:endParaRPr lang="en-DK" sz="3200" dirty="0"/>
+          </a:p>
+        </p:txBody>
+      </p:sp>
+      <p:sp>
+        <p:nvSpPr>
+          <p:cNvPr id="40" name="TextBox 39">
+            <a:extLst>
+              <a:ext uri="{FF2B5EF4-FFF2-40B4-BE49-F238E27FC236}">
+                <a16:creationId xmlns:a16="http://schemas.microsoft.com/office/drawing/2014/main" id="{28E218A1-B917-C5B0-69CC-8FD3D94AB2A9}"/>
+              </a:ext>
+            </a:extLst>
+          </p:cNvPr>
+          <p:cNvSpPr txBox="1"/>
+          <p:nvPr/>
+        </p:nvSpPr>
+        <p:spPr>
+          <a:xfrm>
+            <a:off x="10608260" y="10437352"/>
+            <a:ext cx="3476016" cy="584775"/>
+          </a:xfrm>
+          <a:prstGeom prst="rect">
+            <a:avLst/>
+          </a:prstGeom>
+          <a:noFill/>
+        </p:spPr>
+        <p:txBody>
+          <a:bodyPr wrap="none" rtlCol="0">
+            <a:spAutoFit/>
+          </a:bodyPr>
+          <a:lstStyle/>
+          <a:p>
+            <a:r>
+              <a:rPr lang="en-US" sz="3200" dirty="0"/>
+              <a:t>Decrease intensity</a:t>
+            </a:r>
+            <a:endParaRPr lang="en-DK" sz="3200" dirty="0"/>
+          </a:p>
+        </p:txBody>
+      </p:sp>
+      <p:sp>
+        <p:nvSpPr>
+          <p:cNvPr id="41" name="TextBox 40">
+            <a:extLst>
+              <a:ext uri="{FF2B5EF4-FFF2-40B4-BE49-F238E27FC236}">
+                <a16:creationId xmlns:a16="http://schemas.microsoft.com/office/drawing/2014/main" id="{B5CDAF75-3C56-D730-003C-7AF957AE3139}"/>
+              </a:ext>
+            </a:extLst>
+          </p:cNvPr>
+          <p:cNvSpPr txBox="1"/>
+          <p:nvPr/>
+        </p:nvSpPr>
+        <p:spPr>
+          <a:xfrm>
+            <a:off x="10608260" y="10989719"/>
+            <a:ext cx="1895904" cy="584775"/>
+          </a:xfrm>
+          <a:prstGeom prst="rect">
+            <a:avLst/>
+          </a:prstGeom>
+          <a:noFill/>
+        </p:spPr>
+        <p:txBody>
+          <a:bodyPr wrap="none" rtlCol="0">
+            <a:spAutoFit/>
+          </a:bodyPr>
+          <a:lstStyle/>
+          <a:p>
+            <a:r>
+              <a:rPr lang="en-US" sz="3200" dirty="0"/>
+              <a:t>Stimulate</a:t>
+            </a:r>
+            <a:endParaRPr lang="en-DK" sz="3200" dirty="0"/>
+          </a:p>
+        </p:txBody>
+      </p:sp>
+      <p:cxnSp>
+        <p:nvCxnSpPr>
+          <p:cNvPr id="44" name="Connector: Elbow 43">
+            <a:extLst>
+              <a:ext uri="{FF2B5EF4-FFF2-40B4-BE49-F238E27FC236}">
+                <a16:creationId xmlns:a16="http://schemas.microsoft.com/office/drawing/2014/main" id="{B1464B40-54E9-269F-CBA2-A92411C829A7}"/>
+              </a:ext>
+            </a:extLst>
+          </p:cNvPr>
+          <p:cNvCxnSpPr>
+            <a:cxnSpLocks/>
+            <a:stCxn id="39" idx="1"/>
+            <a:endCxn id="32" idx="0"/>
+          </p:cNvCxnSpPr>
+          <p:nvPr/>
+        </p:nvCxnSpPr>
+        <p:spPr>
+          <a:xfrm rot="10800000">
+            <a:off x="7720012" y="8984451"/>
+            <a:ext cx="2888248" cy="1192922"/>
+          </a:xfrm>
+          <a:prstGeom prst="bentConnector2">
+            <a:avLst/>
+          </a:prstGeom>
+          <a:ln w="38100">
+            <a:solidFill>
+              <a:srgbClr val="FF0000"/>
+            </a:solidFill>
+            <a:tailEnd type="triangle"/>
+          </a:ln>
+        </p:spPr>
+        <p:style>
+          <a:lnRef idx="2">
+            <a:schemeClr val="accent1"/>
+          </a:lnRef>
+          <a:fillRef idx="0">
+            <a:schemeClr val="accent1"/>
+          </a:fillRef>
+          <a:effectRef idx="1">
+            <a:schemeClr val="accent1"/>
+          </a:effectRef>
+          <a:fontRef idx="minor">
+            <a:schemeClr val="tx1"/>
+          </a:fontRef>
+        </p:style>
+      </p:cxnSp>
+      <p:cxnSp>
+        <p:nvCxnSpPr>
+          <p:cNvPr id="51" name="Connector: Elbow 50">
+            <a:extLst>
+              <a:ext uri="{FF2B5EF4-FFF2-40B4-BE49-F238E27FC236}">
+                <a16:creationId xmlns:a16="http://schemas.microsoft.com/office/drawing/2014/main" id="{7DF91590-B1B7-6913-F310-BA3CF0D35878}"/>
+              </a:ext>
+            </a:extLst>
+          </p:cNvPr>
+          <p:cNvCxnSpPr>
+            <a:cxnSpLocks/>
+            <a:stCxn id="40" idx="1"/>
+            <a:endCxn id="31" idx="0"/>
+          </p:cNvCxnSpPr>
+          <p:nvPr/>
+        </p:nvCxnSpPr>
+        <p:spPr>
+          <a:xfrm rot="10800000">
+            <a:off x="6460332" y="8984452"/>
+            <a:ext cx="4147929" cy="1745288"/>
+          </a:xfrm>
+          <a:prstGeom prst="bentConnector2">
+            <a:avLst/>
+          </a:prstGeom>
+          <a:ln w="38100">
+            <a:solidFill>
+              <a:srgbClr val="FF0000"/>
+            </a:solidFill>
+            <a:tailEnd type="triangle"/>
+          </a:ln>
+        </p:spPr>
+        <p:style>
+          <a:lnRef idx="2">
+            <a:schemeClr val="accent1"/>
+          </a:lnRef>
+          <a:fillRef idx="0">
+            <a:schemeClr val="accent1"/>
+          </a:fillRef>
+          <a:effectRef idx="1">
+            <a:schemeClr val="accent1"/>
+          </a:effectRef>
+          <a:fontRef idx="minor">
+            <a:schemeClr val="tx1"/>
+          </a:fontRef>
+        </p:style>
+      </p:cxnSp>
+      <p:cxnSp>
+        <p:nvCxnSpPr>
+          <p:cNvPr id="55" name="Connector: Elbow 54">
+            <a:extLst>
+              <a:ext uri="{FF2B5EF4-FFF2-40B4-BE49-F238E27FC236}">
+                <a16:creationId xmlns:a16="http://schemas.microsoft.com/office/drawing/2014/main" id="{F38F25A5-2AC6-D1F3-833B-7FBD1D56F8D6}"/>
+              </a:ext>
+            </a:extLst>
+          </p:cNvPr>
+          <p:cNvCxnSpPr>
+            <a:cxnSpLocks/>
+            <a:stCxn id="41" idx="1"/>
+            <a:endCxn id="30" idx="0"/>
+          </p:cNvCxnSpPr>
+          <p:nvPr/>
+        </p:nvCxnSpPr>
+        <p:spPr>
+          <a:xfrm rot="10800000">
+            <a:off x="5543154" y="8984453"/>
+            <a:ext cx="5065107" cy="2297654"/>
+          </a:xfrm>
+          <a:prstGeom prst="bentConnector2">
             <a:avLst/>
           </a:prstGeom>
           <a:ln w="38100">
@@ -4695,6 +5231,26 @@
 </file>
 
 <file path=customXml/item1.xml><?xml version="1.0" encoding="utf-8"?>
+<p:properties xmlns:p="http://schemas.microsoft.com/office/2006/metadata/properties" xmlns:xsi="http://www.w3.org/2001/XMLSchema-instance" xmlns:pc="http://schemas.microsoft.com/office/infopath/2007/PartnerControls">
+  <documentManagement>
+    <TaxCatchAll xmlns="6dfb7b4b-871d-4c24-9d42-16b14ecd044c" xsi:nil="true"/>
+    <lcf76f155ced4ddcb4097134ff3c332f xmlns="51c7d8ad-74c8-4833-8478-0d0a5cafce0c">
+      <Terms xmlns="http://schemas.microsoft.com/office/infopath/2007/PartnerControls"/>
+    </lcf76f155ced4ddcb4097134ff3c332f>
+  </documentManagement>
+</p:properties>
+</file>
+
+<file path=customXml/item2.xml><?xml version="1.0" encoding="utf-8"?>
+<?mso-contentType ?>
+<FormTemplates xmlns="http://schemas.microsoft.com/sharepoint/v3/contenttype/forms">
+  <Display>DocumentLibraryForm</Display>
+  <Edit>DocumentLibraryForm</Edit>
+  <New>DocumentLibraryForm</New>
+</FormTemplates>
+</file>
+
+<file path=customXml/item3.xml><?xml version="1.0" encoding="utf-8"?>
 <ct:contentTypeSchema xmlns:ct="http://schemas.microsoft.com/office/2006/metadata/contentType" xmlns:ma="http://schemas.microsoft.com/office/2006/metadata/properties/metaAttributes" ct:_="" ma:_="" ma:contentTypeName="Document" ma:contentTypeID="0x0101005B996248A2D0E04D87B9DBB54D269DA4" ma:contentTypeVersion="18" ma:contentTypeDescription="Create a new document." ma:contentTypeScope="" ma:versionID="f22bde94a6705f7f7e236c14bc19f189">
   <xsd:schema xmlns:xsd="http://www.w3.org/2001/XMLSchema" xmlns:xs="http://www.w3.org/2001/XMLSchema" xmlns:p="http://schemas.microsoft.com/office/2006/metadata/properties" xmlns:ns2="51c7d8ad-74c8-4833-8478-0d0a5cafce0c" xmlns:ns3="6dfb7b4b-871d-4c24-9d42-16b14ecd044c" targetNamespace="http://schemas.microsoft.com/office/2006/metadata/properties" ma:root="true" ma:fieldsID="273248db29f554cba2c15e8dd349c138" ns2:_="" ns3:_="">
     <xsd:import namespace="51c7d8ad-74c8-4833-8478-0d0a5cafce0c"/>
@@ -4949,27 +5505,26 @@
 </ct:contentTypeSchema>
 </file>
 
-<file path=customXml/item2.xml><?xml version="1.0" encoding="utf-8"?>
-<?mso-contentType ?>
-<FormTemplates xmlns="http://schemas.microsoft.com/sharepoint/v3/contenttype/forms">
-  <Display>DocumentLibraryForm</Display>
-  <Edit>DocumentLibraryForm</Edit>
-  <New>DocumentLibraryForm</New>
-</FormTemplates>
+<file path=customXml/itemProps1.xml><?xml version="1.0" encoding="utf-8"?>
+<ds:datastoreItem xmlns:ds="http://schemas.openxmlformats.org/officeDocument/2006/customXml" ds:itemID="{2EF670CE-B0AA-4D52-AFC6-AA4BF7D46EEA}">
+  <ds:schemaRefs>
+    <ds:schemaRef ds:uri="http://schemas.microsoft.com/office/2006/metadata/properties"/>
+    <ds:schemaRef ds:uri="http://schemas.microsoft.com/office/infopath/2007/PartnerControls"/>
+    <ds:schemaRef ds:uri="6dfb7b4b-871d-4c24-9d42-16b14ecd044c"/>
+    <ds:schemaRef ds:uri="51c7d8ad-74c8-4833-8478-0d0a5cafce0c"/>
+  </ds:schemaRefs>
+</ds:datastoreItem>
 </file>
 
-<file path=customXml/item3.xml><?xml version="1.0" encoding="utf-8"?>
-<p:properties xmlns:p="http://schemas.microsoft.com/office/2006/metadata/properties" xmlns:xsi="http://www.w3.org/2001/XMLSchema-instance" xmlns:pc="http://schemas.microsoft.com/office/infopath/2007/PartnerControls">
-  <documentManagement>
-    <TaxCatchAll xmlns="6dfb7b4b-871d-4c24-9d42-16b14ecd044c" xsi:nil="true"/>
-    <lcf76f155ced4ddcb4097134ff3c332f xmlns="51c7d8ad-74c8-4833-8478-0d0a5cafce0c">
-      <Terms xmlns="http://schemas.microsoft.com/office/infopath/2007/PartnerControls"/>
-    </lcf76f155ced4ddcb4097134ff3c332f>
-  </documentManagement>
-</p:properties>
+<file path=customXml/itemProps2.xml><?xml version="1.0" encoding="utf-8"?>
+<ds:datastoreItem xmlns:ds="http://schemas.openxmlformats.org/officeDocument/2006/customXml" ds:itemID="{EF875D47-8106-485E-98E0-D60C6A98DA6A}">
+  <ds:schemaRefs>
+    <ds:schemaRef ds:uri="http://schemas.microsoft.com/sharepoint/v3/contenttype/forms"/>
+  </ds:schemaRefs>
+</ds:datastoreItem>
 </file>
 
-<file path=customXml/itemProps1.xml><?xml version="1.0" encoding="utf-8"?>
+<file path=customXml/itemProps3.xml><?xml version="1.0" encoding="utf-8"?>
 <ds:datastoreItem xmlns:ds="http://schemas.openxmlformats.org/officeDocument/2006/customXml" ds:itemID="{172A1115-3E72-42E2-A544-7EAA53D3702E}">
   <ds:schemaRefs>
     <ds:schemaRef ds:uri="http://schemas.microsoft.com/office/2006/metadata/contentType"/>
@@ -4986,23 +5541,4 @@
     <ds:schemaRef ds:uri="http://schemas.microsoft.com/internal/obd"/>
   </ds:schemaRefs>
 </ds:datastoreItem>
-</file>
-
-<file path=customXml/itemProps2.xml><?xml version="1.0" encoding="utf-8"?>
-<ds:datastoreItem xmlns:ds="http://schemas.openxmlformats.org/officeDocument/2006/customXml" ds:itemID="{EF875D47-8106-485E-98E0-D60C6A98DA6A}">
-  <ds:schemaRefs>
-    <ds:schemaRef ds:uri="http://schemas.microsoft.com/sharepoint/v3/contenttype/forms"/>
-  </ds:schemaRefs>
-</ds:datastoreItem>
-</file>
-
-<file path=customXml/itemProps3.xml><?xml version="1.0" encoding="utf-8"?>
-<ds:datastoreItem xmlns:ds="http://schemas.openxmlformats.org/officeDocument/2006/customXml" ds:itemID="{2EF670CE-B0AA-4D52-AFC6-AA4BF7D46EEA}">
-  <ds:schemaRefs>
-    <ds:schemaRef ds:uri="http://schemas.microsoft.com/office/2006/metadata/properties"/>
-    <ds:schemaRef ds:uri="http://schemas.microsoft.com/office/infopath/2007/PartnerControls"/>
-    <ds:schemaRef ds:uri="6dfb7b4b-871d-4c24-9d42-16b14ecd044c"/>
-    <ds:schemaRef ds:uri="51c7d8ad-74c8-4833-8478-0d0a5cafce0c"/>
-  </ds:schemaRefs>
-</ds:datastoreItem>
 </file>